--- a/courseware/202611_ADS_W13_Computer_Principles_2.pptx
+++ b/courseware/202611_ADS_W13_Computer_Principles_2.pptx
@@ -8713,7 +8713,7 @@
                 <a:ea typeface="Microsoft YaHei" pitchFamily="34" charset="-122"/>
                 <a:cs typeface="Microsoft YaHei" pitchFamily="34" charset="-120"/>
               </a:rPr>
-              <a:t>OJ 内存限制常见 64–256 MB：n=10⁷ 的一维 list 就已经危险，改用 bytearray / array（第 5 周月考 T4 筛法就是这么写的）。</a:t>
+              <a:t>OJ 内存限制常见 64–256 MB：n=10⁷ 的一维 list 就已经危险，改用 bytearray / array；筛法的内层切片写法可回看 W04 的埃氏筛实现。</a:t>
             </a:r>
             <a:endParaRPr lang="en-US" sz="950" dirty="0"/>
           </a:p>

--- a/courseware/202611_ADS_W13_Computer_Principles_2.pptx
+++ b/courseware/202611_ADS_W13_Computer_Principles_2.pptx
@@ -8713,7 +8713,7 @@
                 <a:ea typeface="Microsoft YaHei" pitchFamily="34" charset="-122"/>
                 <a:cs typeface="Microsoft YaHei" pitchFamily="34" charset="-120"/>
               </a:rPr>
-              <a:t>OJ 内存限制常见 64–256 MB：n=10⁷ 的一维 list 就已经危险，改用 bytearray / array；筛法的内层切片写法可回看 W04 的埃氏筛实现。</a:t>
+              <a:t>OJ 内存限制常见 64–256 MB：n=10⁷ 的一维 list 就已经危险，改用 bytearray / array；可回看 W04 埃氏筛从 i*i 开始逐个标记倍数的循环。</a:t>
             </a:r>
             <a:endParaRPr lang="en-US" sz="950" dirty="0"/>
           </a:p>
